--- a/RL_Project_Presentation.pptx
+++ b/RL_Project_Presentation.pptx
@@ -16316,7 +16316,7 @@
           <p:nvPr>
             <p:extLst>
               <p:ext uri="{D42A27DB-BD31-4B8C-83A1-F6EECF244321}">
-                <p14:modId xmlns:p14="http://schemas.microsoft.com/office/powerpoint/2010/main" val="861537199"/>
+                <p14:modId xmlns:p14="http://schemas.microsoft.com/office/powerpoint/2010/main" val="3790927705"/>
               </p:ext>
             </p:extLst>
           </p:nvPr>
@@ -16711,7 +16711,7 @@
                           <a:ea typeface="+mj-ea"/>
                           <a:cs typeface="Calibri" pitchFamily="34" charset="-120"/>
                         </a:rPr>
-                        <a:t>0.430</a:t>
+                        <a:t>0.435</a:t>
                       </a:r>
                       <a:endParaRPr lang="en-US" sz="1300" dirty="0">
                         <a:latin typeface="+mj-ea"/>
@@ -39831,11 +39831,10 @@
           <a:bodyPr wrap="square" lIns="0" tIns="0" rIns="0" bIns="0" rtlCol="0" anchor="t"/>
           <a:lstStyle/>
           <a:p>
-            <a:pPr marL="0" indent="0">
+            <a:pPr>
               <a:lnSpc>
                 <a:spcPct val="113000"/>
               </a:lnSpc>
-              <a:buNone/>
             </a:pPr>
             <a:r>
               <a:rPr lang="en-US" sz="1300" dirty="0">
@@ -39846,7 +39845,40 @@
                 <a:ea typeface="+mj-ea"/>
                 <a:cs typeface="Calibri" pitchFamily="34" charset="-120"/>
               </a:rPr>
-              <a:t>dev F1은 개선→정점→후반 drift 패턴(seed42 peak 0.507@step80). seed7은 step100에 dev 0.354·search 1.45로 포맷 붕괴 — dev-best가 붕괴 직전 peak 보존.</a:t>
+              <a:t>dev F1은 개선→정점→후반 drift 패턴(seed42 peak 0.507@step80). seed7은 step100에 dev 0.354·search 1.2(</a:t>
+            </a:r>
+            <a:r>
+              <a:rPr lang="ko-KR" altLang="en-US" sz="1300" dirty="0">
+                <a:solidFill>
+                  <a:srgbClr val="1F1F27"/>
+                </a:solidFill>
+                <a:latin typeface="+mj-ea"/>
+                <a:ea typeface="+mj-ea"/>
+                <a:cs typeface="Calibri" pitchFamily="34" charset="-120"/>
+              </a:rPr>
+              <a:t>후반 평균 ≈ </a:t>
+            </a:r>
+            <a:r>
+              <a:rPr lang="en-US" altLang="ko-KR" sz="1300" dirty="0">
+                <a:solidFill>
+                  <a:srgbClr val="1F1F27"/>
+                </a:solidFill>
+                <a:latin typeface="+mj-ea"/>
+                <a:ea typeface="+mj-ea"/>
+                <a:cs typeface="Calibri" pitchFamily="34" charset="-120"/>
+              </a:rPr>
+              <a:t>1.4)</a:t>
+            </a:r>
+            <a:r>
+              <a:rPr lang="en-US" sz="1300" dirty="0">
+                <a:solidFill>
+                  <a:srgbClr val="1F1F27"/>
+                </a:solidFill>
+                <a:latin typeface="+mj-ea"/>
+                <a:ea typeface="+mj-ea"/>
+                <a:cs typeface="Calibri" pitchFamily="34" charset="-120"/>
+              </a:rPr>
+              <a:t>로 포맷 붕괴 — dev-best가 붕괴 직전 peak 보존.</a:t>
             </a:r>
             <a:endParaRPr lang="en-US" sz="1300" dirty="0">
               <a:latin typeface="+mj-ea"/>
@@ -47365,7 +47397,7 @@
                 <a:ea typeface="+mj-ea"/>
                 <a:cs typeface="Arial" pitchFamily="34" charset="-120"/>
               </a:rPr>
-              <a:t>문제 설정</a:t>
+              <a:t>문제 설정 </a:t>
             </a:r>
             <a:r>
               <a:rPr lang="en-US" sz="2900" b="1" dirty="0">

--- a/RL_Project_Presentation.pptx
+++ b/RL_Project_Presentation.pptx
@@ -12201,7 +12201,7 @@
                   </a:extLst>
                 </a:gridCol>
               </a:tblGrid>
-              <a:tr h="420624">
+              <a:tr h="368046">
                 <a:tc>
                   <a:txBody>
                     <a:bodyPr/>
@@ -12480,7 +12480,7 @@
                   </a:ext>
                 </a:extLst>
               </a:tr>
-              <a:tr h="420624">
+              <a:tr h="368046">
                 <a:tc>
                   <a:txBody>
                     <a:bodyPr/>
@@ -12747,7 +12747,7 @@
                   </a:ext>
                 </a:extLst>
               </a:tr>
-              <a:tr h="420624">
+              <a:tr h="368046">
                 <a:tc>
                   <a:txBody>
                     <a:bodyPr/>
@@ -13014,7 +13014,7 @@
                   </a:ext>
                 </a:extLst>
               </a:tr>
-              <a:tr h="420624">
+              <a:tr h="368046">
                 <a:tc>
                   <a:txBody>
                     <a:bodyPr/>
@@ -13281,7 +13281,7 @@
                   </a:ext>
                 </a:extLst>
               </a:tr>
-              <a:tr h="420624">
+              <a:tr h="368046">
                 <a:tc>
                   <a:txBody>
                     <a:bodyPr/>
@@ -13548,7 +13548,7 @@
                   </a:ext>
                 </a:extLst>
               </a:tr>
-              <a:tr h="420624">
+              <a:tr h="368046">
                 <a:tc>
                   <a:txBody>
                     <a:bodyPr/>
@@ -13815,7 +13815,274 @@
                   </a:ext>
                 </a:extLst>
               </a:tr>
-              <a:tr h="420624">
+              <a:tr h="368046">
+                <a:tc>
+                  <a:txBody>
+                    <a:bodyPr/>
+                    <a:lstStyle/>
+                    <a:p>
+                      <a:pPr marL="0" indent="0">
+                        <a:buNone/>
+                      </a:pPr>
+                      <a:r>
+                        <a:rPr lang="en-US" sz="1250" dirty="0">
+                          <a:solidFill>
+                            <a:srgbClr val="1F1F27"/>
+                          </a:solidFill>
+                          <a:latin typeface="+mj-ea"/>
+                          <a:ea typeface="+mj-ea"/>
+                          <a:cs typeface="Calibri" pitchFamily="34" charset="-120"/>
+                        </a:rPr>
+                        <a:t>BC-only (지도학습)</a:t>
+                      </a:r>
+                      <a:endParaRPr lang="en-US" sz="1250" dirty="0">
+                        <a:latin typeface="+mj-ea"/>
+                        <a:ea typeface="+mj-ea"/>
+                        <a:cs typeface="Calibri" charset="0"/>
+                      </a:endParaRPr>
+                    </a:p>
+                  </a:txBody>
+                  <a:tcPr anchor="ctr">
+                    <a:lnL w="6350" cap="flat" cmpd="sng" algn="ctr">
+                      <a:solidFill>
+                        <a:srgbClr val="E4E4EC"/>
+                      </a:solidFill>
+                      <a:prstDash val="solid"/>
+                      <a:round/>
+                      <a:headEnd type="none" w="med" len="med"/>
+                      <a:tailEnd type="none" w="med" len="med"/>
+                    </a:lnL>
+                    <a:lnR w="6350" cap="flat" cmpd="sng" algn="ctr">
+                      <a:solidFill>
+                        <a:srgbClr val="E4E4EC"/>
+                      </a:solidFill>
+                      <a:prstDash val="solid"/>
+                      <a:round/>
+                      <a:headEnd type="none" w="med" len="med"/>
+                      <a:tailEnd type="none" w="med" len="med"/>
+                    </a:lnR>
+                    <a:lnT w="6350" cap="flat" cmpd="sng" algn="ctr">
+                      <a:solidFill>
+                        <a:srgbClr val="E4E4EC"/>
+                      </a:solidFill>
+                      <a:prstDash val="solid"/>
+                      <a:round/>
+                      <a:headEnd type="none" w="med" len="med"/>
+                      <a:tailEnd type="none" w="med" len="med"/>
+                    </a:lnT>
+                    <a:lnB w="6350" cap="flat" cmpd="sng" algn="ctr">
+                      <a:solidFill>
+                        <a:srgbClr val="E4E4EC"/>
+                      </a:solidFill>
+                      <a:prstDash val="solid"/>
+                      <a:round/>
+                      <a:headEnd type="none" w="med" len="med"/>
+                      <a:tailEnd type="none" w="med" len="med"/>
+                    </a:lnB>
+                  </a:tcPr>
+                </a:tc>
+                <a:tc>
+                  <a:txBody>
+                    <a:bodyPr/>
+                    <a:lstStyle/>
+                    <a:p>
+                      <a:pPr marL="0" indent="0" algn="ctr">
+                        <a:buNone/>
+                      </a:pPr>
+                      <a:r>
+                        <a:rPr lang="en-US" sz="1250" dirty="0">
+                          <a:solidFill>
+                            <a:srgbClr val="1F1F27"/>
+                          </a:solidFill>
+                          <a:latin typeface="+mj-ea"/>
+                          <a:ea typeface="+mj-ea"/>
+                          <a:cs typeface="Calibri" pitchFamily="34" charset="-120"/>
+                        </a:rPr>
+                        <a:t>0.335 ±.005</a:t>
+                      </a:r>
+                      <a:endParaRPr lang="en-US" sz="1250" dirty="0">
+                        <a:latin typeface="+mj-ea"/>
+                        <a:ea typeface="+mj-ea"/>
+                        <a:cs typeface="Calibri" charset="0"/>
+                      </a:endParaRPr>
+                    </a:p>
+                  </a:txBody>
+                  <a:tcPr anchor="ctr">
+                    <a:lnL w="6350" cap="flat" cmpd="sng" algn="ctr">
+                      <a:solidFill>
+                        <a:srgbClr val="E4E4EC"/>
+                      </a:solidFill>
+                      <a:prstDash val="solid"/>
+                      <a:round/>
+                      <a:headEnd type="none" w="med" len="med"/>
+                      <a:tailEnd type="none" w="med" len="med"/>
+                    </a:lnL>
+                    <a:lnR w="6350" cap="flat" cmpd="sng" algn="ctr">
+                      <a:solidFill>
+                        <a:srgbClr val="E4E4EC"/>
+                      </a:solidFill>
+                      <a:prstDash val="solid"/>
+                      <a:round/>
+                      <a:headEnd type="none" w="med" len="med"/>
+                      <a:tailEnd type="none" w="med" len="med"/>
+                    </a:lnR>
+                    <a:lnT w="6350" cap="flat" cmpd="sng" algn="ctr">
+                      <a:solidFill>
+                        <a:srgbClr val="E4E4EC"/>
+                      </a:solidFill>
+                      <a:prstDash val="solid"/>
+                      <a:round/>
+                      <a:headEnd type="none" w="med" len="med"/>
+                      <a:tailEnd type="none" w="med" len="med"/>
+                    </a:lnT>
+                    <a:lnB w="6350" cap="flat" cmpd="sng" algn="ctr">
+                      <a:solidFill>
+                        <a:srgbClr val="E4E4EC"/>
+                      </a:solidFill>
+                      <a:prstDash val="solid"/>
+                      <a:round/>
+                      <a:headEnd type="none" w="med" len="med"/>
+                      <a:tailEnd type="none" w="med" len="med"/>
+                    </a:lnB>
+                  </a:tcPr>
+                </a:tc>
+                <a:tc>
+                  <a:txBody>
+                    <a:bodyPr/>
+                    <a:lstStyle/>
+                    <a:p>
+                      <a:pPr marL="0" indent="0" algn="ctr">
+                        <a:buNone/>
+                      </a:pPr>
+                      <a:r>
+                        <a:rPr lang="en-US" sz="1250" dirty="0">
+                          <a:solidFill>
+                            <a:srgbClr val="1F1F27"/>
+                          </a:solidFill>
+                          <a:latin typeface="+mj-ea"/>
+                          <a:ea typeface="+mj-ea"/>
+                          <a:cs typeface="Calibri" pitchFamily="34" charset="-120"/>
+                        </a:rPr>
+                        <a:t>0.546</a:t>
+                      </a:r>
+                      <a:endParaRPr lang="en-US" sz="1250" dirty="0">
+                        <a:latin typeface="+mj-ea"/>
+                        <a:ea typeface="+mj-ea"/>
+                        <a:cs typeface="Calibri" charset="0"/>
+                      </a:endParaRPr>
+                    </a:p>
+                  </a:txBody>
+                  <a:tcPr anchor="ctr">
+                    <a:lnL w="6350" cap="flat" cmpd="sng" algn="ctr">
+                      <a:solidFill>
+                        <a:srgbClr val="E4E4EC"/>
+                      </a:solidFill>
+                      <a:prstDash val="solid"/>
+                      <a:round/>
+                      <a:headEnd type="none" w="med" len="med"/>
+                      <a:tailEnd type="none" w="med" len="med"/>
+                    </a:lnL>
+                    <a:lnR w="6350" cap="flat" cmpd="sng" algn="ctr">
+                      <a:solidFill>
+                        <a:srgbClr val="E4E4EC"/>
+                      </a:solidFill>
+                      <a:prstDash val="solid"/>
+                      <a:round/>
+                      <a:headEnd type="none" w="med" len="med"/>
+                      <a:tailEnd type="none" w="med" len="med"/>
+                    </a:lnR>
+                    <a:lnT w="6350" cap="flat" cmpd="sng" algn="ctr">
+                      <a:solidFill>
+                        <a:srgbClr val="E4E4EC"/>
+                      </a:solidFill>
+                      <a:prstDash val="solid"/>
+                      <a:round/>
+                      <a:headEnd type="none" w="med" len="med"/>
+                      <a:tailEnd type="none" w="med" len="med"/>
+                    </a:lnT>
+                    <a:lnB w="6350" cap="flat" cmpd="sng" algn="ctr">
+                      <a:solidFill>
+                        <a:srgbClr val="E4E4EC"/>
+                      </a:solidFill>
+                      <a:prstDash val="solid"/>
+                      <a:round/>
+                      <a:headEnd type="none" w="med" len="med"/>
+                      <a:tailEnd type="none" w="med" len="med"/>
+                    </a:lnB>
+                  </a:tcPr>
+                </a:tc>
+                <a:tc>
+                  <a:txBody>
+                    <a:bodyPr/>
+                    <a:lstStyle/>
+                    <a:p>
+                      <a:pPr marL="0" indent="0" algn="ctr">
+                        <a:buNone/>
+                      </a:pPr>
+                      <a:r>
+                        <a:rPr lang="en-US" sz="1250" dirty="0">
+                          <a:solidFill>
+                            <a:srgbClr val="1F1F27"/>
+                          </a:solidFill>
+                          <a:latin typeface="+mj-ea"/>
+                          <a:ea typeface="+mj-ea"/>
+                          <a:cs typeface="Calibri" pitchFamily="34" charset="-120"/>
+                        </a:rPr>
+                        <a:t>2.0</a:t>
+                      </a:r>
+                      <a:endParaRPr lang="en-US" sz="1250" dirty="0">
+                        <a:latin typeface="+mj-ea"/>
+                        <a:ea typeface="+mj-ea"/>
+                        <a:cs typeface="Calibri" charset="0"/>
+                      </a:endParaRPr>
+                    </a:p>
+                  </a:txBody>
+                  <a:tcPr anchor="ctr">
+                    <a:lnL w="6350" cap="flat" cmpd="sng" algn="ctr">
+                      <a:solidFill>
+                        <a:srgbClr val="E4E4EC"/>
+                      </a:solidFill>
+                      <a:prstDash val="solid"/>
+                      <a:round/>
+                      <a:headEnd type="none" w="med" len="med"/>
+                      <a:tailEnd type="none" w="med" len="med"/>
+                    </a:lnL>
+                    <a:lnR w="6350" cap="flat" cmpd="sng" algn="ctr">
+                      <a:solidFill>
+                        <a:srgbClr val="E4E4EC"/>
+                      </a:solidFill>
+                      <a:prstDash val="solid"/>
+                      <a:round/>
+                      <a:headEnd type="none" w="med" len="med"/>
+                      <a:tailEnd type="none" w="med" len="med"/>
+                    </a:lnR>
+                    <a:lnT w="6350" cap="flat" cmpd="sng" algn="ctr">
+                      <a:solidFill>
+                        <a:srgbClr val="E4E4EC"/>
+                      </a:solidFill>
+                      <a:prstDash val="solid"/>
+                      <a:round/>
+                      <a:headEnd type="none" w="med" len="med"/>
+                      <a:tailEnd type="none" w="med" len="med"/>
+                    </a:lnT>
+                    <a:lnB w="6350" cap="flat" cmpd="sng" algn="ctr">
+                      <a:solidFill>
+                        <a:srgbClr val="E4E4EC"/>
+                      </a:solidFill>
+                      <a:prstDash val="solid"/>
+                      <a:round/>
+                      <a:headEnd type="none" w="med" len="med"/>
+                      <a:tailEnd type="none" w="med" len="med"/>
+                    </a:lnB>
+                  </a:tcPr>
+                </a:tc>
+                <a:extLst>
+                  <a:ext uri="{0D108BD9-81ED-4DB2-BD59-A6C34878D82A}">
+                    <a16:rowId xmlns:a16="http://schemas.microsoft.com/office/drawing/2014/main" val="10005"/>
+                  </a:ext>
+                </a:extLst>
+              </a:tr>
+              <a:tr h="368046">
                 <a:tc>
                   <a:txBody>
                     <a:bodyPr/>
@@ -14200,6 +14467,17 @@
                 <a:cs typeface="Calibri" pitchFamily="34" charset="-120"/>
               </a:rPr>
               <a:t>단 단락을 2개만 keep해 cosine 휴리스틱(3개)과 비슷한 F1 — precision 이점.</a:t>
+            </a:r>
+            <a:r>
+              <a:rPr lang="en-US" sz="1300" dirty="0">
+                <a:solidFill>
+                  <a:srgbClr val="1F1F27"/>
+                </a:solidFill>
+                <a:latin typeface="+mj-ea"/>
+                <a:ea typeface="+mj-ea"/>
+                <a:cs typeface="Calibri" pitchFamily="34" charset="-120"/>
+              </a:rPr>
+              <a:t> BC-only(0.335)도 RL과 동급 → 한계는 RL 방식이 아니라 정책 표현 용량.</a:t>
             </a:r>
             <a:endParaRPr lang="en-US" sz="1300" dirty="0">
               <a:latin typeface="+mj-ea"/>
@@ -14370,7 +14648,7 @@
                   </a:extLst>
                 </a:gridCol>
               </a:tblGrid>
-              <a:tr h="420624">
+              <a:tr h="368046">
                 <a:tc>
                   <a:txBody>
                     <a:bodyPr/>
@@ -14581,7 +14859,7 @@
                   </a:ext>
                 </a:extLst>
               </a:tr>
-              <a:tr h="420624">
+              <a:tr h="368046">
                 <a:tc>
                   <a:txBody>
                     <a:bodyPr/>
@@ -14783,7 +15061,7 @@
                   </a:ext>
                 </a:extLst>
               </a:tr>
-              <a:tr h="420624">
+              <a:tr h="368046">
                 <a:tc>
                   <a:txBody>
                     <a:bodyPr/>
@@ -14985,7 +15263,7 @@
                   </a:ext>
                 </a:extLst>
               </a:tr>
-              <a:tr h="420624">
+              <a:tr h="368046">
                 <a:tc>
                   <a:txBody>
                     <a:bodyPr/>
@@ -15187,7 +15465,7 @@
                   </a:ext>
                 </a:extLst>
               </a:tr>
-              <a:tr h="420624">
+              <a:tr h="368046">
                 <a:tc>
                   <a:txBody>
                     <a:bodyPr/>
@@ -15389,7 +15667,7 @@
                   </a:ext>
                 </a:extLst>
               </a:tr>
-              <a:tr h="420624">
+              <a:tr h="368046">
                 <a:tc>
                   <a:txBody>
                     <a:bodyPr/>
@@ -15591,7 +15869,209 @@
                   </a:ext>
                 </a:extLst>
               </a:tr>
-              <a:tr h="420624">
+              <a:tr h="368046">
+                <a:tc>
+                  <a:txBody>
+                    <a:bodyPr/>
+                    <a:lstStyle/>
+                    <a:p>
+                      <a:pPr marL="0" indent="0">
+                        <a:buNone/>
+                      </a:pPr>
+                      <a:r>
+                        <a:rPr lang="en-US" sz="1250" dirty="0">
+                          <a:solidFill>
+                            <a:srgbClr val="1F1F27"/>
+                          </a:solidFill>
+                          <a:latin typeface="+mj-ea"/>
+                          <a:ea typeface="+mj-ea"/>
+                          <a:cs typeface="Calibri" pitchFamily="34" charset="-120"/>
+                        </a:rPr>
+                        <a:t>BC-only (지도학습)</a:t>
+                      </a:r>
+                      <a:endParaRPr lang="en-US" sz="1250" dirty="0">
+                        <a:latin typeface="+mj-ea"/>
+                        <a:ea typeface="+mj-ea"/>
+                        <a:cs typeface="Calibri" charset="0"/>
+                      </a:endParaRPr>
+                    </a:p>
+                  </a:txBody>
+                  <a:tcPr anchor="ctr">
+                    <a:lnL w="6350" cap="flat" cmpd="sng" algn="ctr">
+                      <a:solidFill>
+                        <a:srgbClr val="E4E4EC"/>
+                      </a:solidFill>
+                      <a:prstDash val="solid"/>
+                      <a:round/>
+                      <a:headEnd type="none" w="med" len="med"/>
+                      <a:tailEnd type="none" w="med" len="med"/>
+                    </a:lnL>
+                    <a:lnR w="6350" cap="flat" cmpd="sng" algn="ctr">
+                      <a:solidFill>
+                        <a:srgbClr val="E4E4EC"/>
+                      </a:solidFill>
+                      <a:prstDash val="solid"/>
+                      <a:round/>
+                      <a:headEnd type="none" w="med" len="med"/>
+                      <a:tailEnd type="none" w="med" len="med"/>
+                    </a:lnR>
+                    <a:lnT w="6350" cap="flat" cmpd="sng" algn="ctr">
+                      <a:solidFill>
+                        <a:srgbClr val="E4E4EC"/>
+                      </a:solidFill>
+                      <a:prstDash val="solid"/>
+                      <a:round/>
+                      <a:headEnd type="none" w="med" len="med"/>
+                      <a:tailEnd type="none" w="med" len="med"/>
+                    </a:lnT>
+                    <a:lnB w="6350" cap="flat" cmpd="sng" algn="ctr">
+                      <a:solidFill>
+                        <a:srgbClr val="E4E4EC"/>
+                      </a:solidFill>
+                      <a:prstDash val="solid"/>
+                      <a:round/>
+                      <a:headEnd type="none" w="med" len="med"/>
+                      <a:tailEnd type="none" w="med" len="med"/>
+                    </a:lnB>
+                  </a:tcPr>
+                </a:tc>
+                <a:tc>
+                  <a:txBody>
+                    <a:bodyPr/>
+                    <a:lstStyle/>
+                    <a:p>
+                      <a:pPr marL="0" indent="0" algn="ctr">
+                        <a:buNone/>
+                      </a:pPr>
+                      <a:r>
+                        <a:rPr lang="en-US" sz="1250" dirty="0">
+                          <a:solidFill>
+                            <a:srgbClr val="1F1F27"/>
+                          </a:solidFill>
+                          <a:latin typeface="+mj-ea"/>
+                          <a:ea typeface="+mj-ea"/>
+                          <a:cs typeface="Calibri" pitchFamily="34" charset="-120"/>
+                        </a:rPr>
+                        <a:t>0.265 ±.035</a:t>
+                      </a:r>
+                      <a:endParaRPr lang="en-US" sz="1250" dirty="0">
+                        <a:latin typeface="+mj-ea"/>
+                        <a:ea typeface="+mj-ea"/>
+                        <a:cs typeface="Calibri" charset="0"/>
+                      </a:endParaRPr>
+                    </a:p>
+                  </a:txBody>
+                  <a:tcPr anchor="ctr">
+                    <a:lnL w="6350" cap="flat" cmpd="sng" algn="ctr">
+                      <a:solidFill>
+                        <a:srgbClr val="E4E4EC"/>
+                      </a:solidFill>
+                      <a:prstDash val="solid"/>
+                      <a:round/>
+                      <a:headEnd type="none" w="med" len="med"/>
+                      <a:tailEnd type="none" w="med" len="med"/>
+                    </a:lnL>
+                    <a:lnR w="6350" cap="flat" cmpd="sng" algn="ctr">
+                      <a:solidFill>
+                        <a:srgbClr val="E4E4EC"/>
+                      </a:solidFill>
+                      <a:prstDash val="solid"/>
+                      <a:round/>
+                      <a:headEnd type="none" w="med" len="med"/>
+                      <a:tailEnd type="none" w="med" len="med"/>
+                    </a:lnR>
+                    <a:lnT w="6350" cap="flat" cmpd="sng" algn="ctr">
+                      <a:solidFill>
+                        <a:srgbClr val="E4E4EC"/>
+                      </a:solidFill>
+                      <a:prstDash val="solid"/>
+                      <a:round/>
+                      <a:headEnd type="none" w="med" len="med"/>
+                      <a:tailEnd type="none" w="med" len="med"/>
+                    </a:lnT>
+                    <a:lnB w="6350" cap="flat" cmpd="sng" algn="ctr">
+                      <a:solidFill>
+                        <a:srgbClr val="E4E4EC"/>
+                      </a:solidFill>
+                      <a:prstDash val="solid"/>
+                      <a:round/>
+                      <a:headEnd type="none" w="med" len="med"/>
+                      <a:tailEnd type="none" w="med" len="med"/>
+                    </a:lnB>
+                  </a:tcPr>
+                </a:tc>
+                <a:tc>
+                  <a:txBody>
+                    <a:bodyPr/>
+                    <a:lstStyle/>
+                    <a:p>
+                      <a:pPr marL="0" indent="0" algn="ctr">
+                        <a:buNone/>
+                      </a:pPr>
+                      <a:r>
+                        <a:rPr lang="en-US" sz="1250" dirty="0">
+                          <a:solidFill>
+                            <a:srgbClr val="1F1F27"/>
+                          </a:solidFill>
+                          <a:latin typeface="+mj-ea"/>
+                          <a:ea typeface="+mj-ea"/>
+                          <a:cs typeface="Calibri" pitchFamily="34" charset="-120"/>
+                        </a:rPr>
+                        <a:t>0.466</a:t>
+                      </a:r>
+                      <a:endParaRPr lang="en-US" sz="1250" dirty="0">
+                        <a:latin typeface="+mj-ea"/>
+                        <a:ea typeface="+mj-ea"/>
+                        <a:cs typeface="Calibri" charset="0"/>
+                      </a:endParaRPr>
+                    </a:p>
+                  </a:txBody>
+                  <a:tcPr anchor="ctr">
+                    <a:lnL w="6350" cap="flat" cmpd="sng" algn="ctr">
+                      <a:solidFill>
+                        <a:srgbClr val="E4E4EC"/>
+                      </a:solidFill>
+                      <a:prstDash val="solid"/>
+                      <a:round/>
+                      <a:headEnd type="none" w="med" len="med"/>
+                      <a:tailEnd type="none" w="med" len="med"/>
+                    </a:lnL>
+                    <a:lnR w="6350" cap="flat" cmpd="sng" algn="ctr">
+                      <a:solidFill>
+                        <a:srgbClr val="E4E4EC"/>
+                      </a:solidFill>
+                      <a:prstDash val="solid"/>
+                      <a:round/>
+                      <a:headEnd type="none" w="med" len="med"/>
+                      <a:tailEnd type="none" w="med" len="med"/>
+                    </a:lnR>
+                    <a:lnT w="6350" cap="flat" cmpd="sng" algn="ctr">
+                      <a:solidFill>
+                        <a:srgbClr val="E4E4EC"/>
+                      </a:solidFill>
+                      <a:prstDash val="solid"/>
+                      <a:round/>
+                      <a:headEnd type="none" w="med" len="med"/>
+                      <a:tailEnd type="none" w="med" len="med"/>
+                    </a:lnT>
+                    <a:lnB w="6350" cap="flat" cmpd="sng" algn="ctr">
+                      <a:solidFill>
+                        <a:srgbClr val="E4E4EC"/>
+                      </a:solidFill>
+                      <a:prstDash val="solid"/>
+                      <a:round/>
+                      <a:headEnd type="none" w="med" len="med"/>
+                      <a:tailEnd type="none" w="med" len="med"/>
+                    </a:lnB>
+                  </a:tcPr>
+                </a:tc>
+                <a:extLst>
+                  <a:ext uri="{0D108BD9-81ED-4DB2-BD59-A6C34878D82A}">
+                    <a16:rowId xmlns:a16="http://schemas.microsoft.com/office/drawing/2014/main" val="10005"/>
+                  </a:ext>
+                </a:extLst>
+              </a:tr>
+              <a:tr h="368046">
                 <a:tc>
                   <a:txBody>
                     <a:bodyPr/>
@@ -16033,6 +16513,17 @@
                 <a:cs typeface="Calibri" pitchFamily="34" charset="-120"/>
               </a:rPr>
               <a:t>.</a:t>
+            </a:r>
+            <a:r>
+              <a:rPr lang="en-US" sz="1350" dirty="0">
+                <a:solidFill>
+                  <a:srgbClr val="1F1F27"/>
+                </a:solidFill>
+                <a:latin typeface="+mj-ea"/>
+                <a:ea typeface="+mj-ea"/>
+                <a:cs typeface="Calibri" pitchFamily="34" charset="-120"/>
+              </a:rPr>
+              <a:t> BC-only도 −21%로 동일 하락 → OOD 취약성은 RL이 아닌 학습형 정책 공통의 성질.</a:t>
             </a:r>
             <a:endParaRPr lang="en-US" sz="1350" dirty="0">
               <a:latin typeface="+mj-ea"/>
@@ -36403,6 +36894,30 @@
               <a:ea typeface="+mj-ea"/>
             </a:endParaRPr>
           </a:p>
+          <a:p>
+            <a:pPr marL="285750" indent="-285750">
+              <a:lnSpc>
+                <a:spcPct val="113000"/>
+              </a:lnSpc>
+              <a:buFont typeface="Arial" panose="020B0604020202020204" pitchFamily="34" charset="0"/>
+              <a:buChar char="•"/>
+            </a:pPr>
+            <a:r>
+              <a:rPr lang="ko-KR" altLang="en-US" sz="1400" dirty="0">
+                <a:solidFill>
+                  <a:srgbClr val="1F1F27"/>
+                </a:solidFill>
+                <a:latin typeface="+mj-ea"/>
+                <a:ea typeface="+mj-ea"/>
+                <a:cs typeface="Calibri" pitchFamily="34" charset="-120"/>
+              </a:rPr>
+              <a:t>지도학습(BC)만으로도 RL과 동급(0.335 vs 0.355) → 한계는 RL 방식이 아니라 정책 표현 용량.</a:t>
+            </a:r>
+            <a:endParaRPr lang="en-US" sz="1400" dirty="0">
+              <a:latin typeface="+mj-ea"/>
+              <a:ea typeface="+mj-ea"/>
+            </a:endParaRPr>
+          </a:p>
         </p:txBody>
       </p:sp>
       <p:sp>
@@ -37835,7 +38350,50 @@
                 <a:latin typeface="+mn-ea"/>
                 <a:cs typeface="Calibri" pitchFamily="34" charset="-120"/>
               </a:rPr>
-              <a:t>선택에 의존함</a:t>
+              <a:t>선택에 의존함
+</a:t>
+            </a:r>
+            <a:endParaRPr lang="en-US" sz="1350" dirty="0">
+              <a:latin typeface="+mn-ea"/>
+            </a:endParaRPr>
+          </a:p>
+          <a:p>
+            <a:pPr marL="0" indent="0">
+              <a:lnSpc>
+                <a:spcPct val="115000"/>
+              </a:lnSpc>
+              <a:buNone/>
+            </a:pPr>
+            <a:r>
+              <a:rPr lang="en-US" sz="1350" b="1" dirty="0">
+                <a:solidFill>
+                  <a:srgbClr val="1F1F27"/>
+                </a:solidFill>
+                <a:latin typeface="+mn-ea"/>
+                <a:cs typeface="Calibri" pitchFamily="34" charset="-120"/>
+              </a:rPr>
+              <a:t>RL 이득은 comparison에 집중</a:t>
+            </a:r>
+            <a:endParaRPr lang="en-US" sz="1350" dirty="0">
+              <a:latin typeface="+mn-ea"/>
+            </a:endParaRPr>
+          </a:p>
+          <a:p>
+            <a:pPr marL="0" indent="0">
+              <a:lnSpc>
+                <a:spcPct val="115000"/>
+              </a:lnSpc>
+              <a:buNone/>
+            </a:pPr>
+            <a:r>
+              <a:rPr lang="en-US" sz="1250" dirty="0">
+                <a:solidFill>
+                  <a:srgbClr val="6E6E79"/>
+                </a:solidFill>
+                <a:latin typeface="+mn-ea"/>
+                <a:cs typeface="Calibri" pitchFamily="34" charset="-120"/>
+              </a:rPr>
+              <a:t>→ bridge(multi-hop 본질)는 +0.01로 사실상 미해결</a:t>
             </a:r>
             <a:endParaRPr lang="en-US" sz="1350" dirty="0">
               <a:latin typeface="+mn-ea"/>
@@ -43241,6 +43799,17 @@
                 <a:cs typeface="Calibri" pitchFamily="34" charset="-120"/>
               </a:rPr>
               <a:t>)</a:t>
+            </a:r>
+            <a:r>
+              <a:rPr lang="en-US" altLang="ko-KR" sz="1600" dirty="0">
+                <a:solidFill>
+                  <a:srgbClr val="1F1F27"/>
+                </a:solidFill>
+                <a:latin typeface="+mj-ea"/>
+                <a:ea typeface="+mj-ea"/>
+                <a:cs typeface="Calibri" pitchFamily="34" charset="-120"/>
+              </a:rPr>
+              <a:t>  ·  BC(지도학습) 0.335도 동급 → 병목은 정책 표현 용량</a:t>
             </a:r>
             <a:endParaRPr lang="en-US" altLang="ko-KR" sz="1600" dirty="0">
               <a:latin typeface="+mj-ea"/>
